--- a/assets/files/4-slide-berurutan.pptx
+++ b/assets/files/4-slide-berurutan.pptx
@@ -107,6 +107,11 @@
       </a:defRPr>
     </a:lvl9pPr>
   </p:defaultTextStyle>
+  <p:extLst>
+    <p:ext uri="{EFAFB233-063F-42B5-8137-9DF3F51BA10A}">
+      <p15:sldGuideLst xmlns:p15="http://schemas.microsoft.com/office/powerpoint/2012/main"/>
+    </p:ext>
+  </p:extLst>
 </p:presentation>
 </file>
 
@@ -259,7 +264,7 @@
           <a:p>
             <a:fld id="{AB6FC267-2E41-4708-BFF3-2E183C4279E0}" type="datetimeFigureOut">
               <a:rPr lang="id-ID" smtClean="0"/>
-              <a:t>27/06/2026</a:t>
+              <a:t>10/07/2026</a:t>
             </a:fld>
             <a:endParaRPr lang="id-ID"/>
           </a:p>
@@ -459,7 +464,7 @@
           <a:p>
             <a:fld id="{AB6FC267-2E41-4708-BFF3-2E183C4279E0}" type="datetimeFigureOut">
               <a:rPr lang="id-ID" smtClean="0"/>
-              <a:t>27/06/2026</a:t>
+              <a:t>10/07/2026</a:t>
             </a:fld>
             <a:endParaRPr lang="id-ID"/>
           </a:p>
@@ -669,7 +674,7 @@
           <a:p>
             <a:fld id="{AB6FC267-2E41-4708-BFF3-2E183C4279E0}" type="datetimeFigureOut">
               <a:rPr lang="id-ID" smtClean="0"/>
-              <a:t>27/06/2026</a:t>
+              <a:t>10/07/2026</a:t>
             </a:fld>
             <a:endParaRPr lang="id-ID"/>
           </a:p>
@@ -869,7 +874,7 @@
           <a:p>
             <a:fld id="{AB6FC267-2E41-4708-BFF3-2E183C4279E0}" type="datetimeFigureOut">
               <a:rPr lang="id-ID" smtClean="0"/>
-              <a:t>27/06/2026</a:t>
+              <a:t>10/07/2026</a:t>
             </a:fld>
             <a:endParaRPr lang="id-ID"/>
           </a:p>
@@ -1145,7 +1150,7 @@
           <a:p>
             <a:fld id="{AB6FC267-2E41-4708-BFF3-2E183C4279E0}" type="datetimeFigureOut">
               <a:rPr lang="id-ID" smtClean="0"/>
-              <a:t>27/06/2026</a:t>
+              <a:t>10/07/2026</a:t>
             </a:fld>
             <a:endParaRPr lang="id-ID"/>
           </a:p>
@@ -1413,7 +1418,7 @@
           <a:p>
             <a:fld id="{AB6FC267-2E41-4708-BFF3-2E183C4279E0}" type="datetimeFigureOut">
               <a:rPr lang="id-ID" smtClean="0"/>
-              <a:t>27/06/2026</a:t>
+              <a:t>10/07/2026</a:t>
             </a:fld>
             <a:endParaRPr lang="id-ID"/>
           </a:p>
@@ -1828,7 +1833,7 @@
           <a:p>
             <a:fld id="{AB6FC267-2E41-4708-BFF3-2E183C4279E0}" type="datetimeFigureOut">
               <a:rPr lang="id-ID" smtClean="0"/>
-              <a:t>27/06/2026</a:t>
+              <a:t>10/07/2026</a:t>
             </a:fld>
             <a:endParaRPr lang="id-ID"/>
           </a:p>
@@ -1970,7 +1975,7 @@
           <a:p>
             <a:fld id="{AB6FC267-2E41-4708-BFF3-2E183C4279E0}" type="datetimeFigureOut">
               <a:rPr lang="id-ID" smtClean="0"/>
-              <a:t>27/06/2026</a:t>
+              <a:t>10/07/2026</a:t>
             </a:fld>
             <a:endParaRPr lang="id-ID"/>
           </a:p>
@@ -2083,7 +2088,7 @@
           <a:p>
             <a:fld id="{AB6FC267-2E41-4708-BFF3-2E183C4279E0}" type="datetimeFigureOut">
               <a:rPr lang="id-ID" smtClean="0"/>
-              <a:t>27/06/2026</a:t>
+              <a:t>10/07/2026</a:t>
             </a:fld>
             <a:endParaRPr lang="id-ID"/>
           </a:p>
@@ -2396,7 +2401,7 @@
           <a:p>
             <a:fld id="{AB6FC267-2E41-4708-BFF3-2E183C4279E0}" type="datetimeFigureOut">
               <a:rPr lang="id-ID" smtClean="0"/>
-              <a:t>27/06/2026</a:t>
+              <a:t>10/07/2026</a:t>
             </a:fld>
             <a:endParaRPr lang="id-ID"/>
           </a:p>
@@ -2685,7 +2690,7 @@
           <a:p>
             <a:fld id="{AB6FC267-2E41-4708-BFF3-2E183C4279E0}" type="datetimeFigureOut">
               <a:rPr lang="id-ID" smtClean="0"/>
-              <a:t>27/06/2026</a:t>
+              <a:t>10/07/2026</a:t>
             </a:fld>
             <a:endParaRPr lang="id-ID"/>
           </a:p>
@@ -2928,7 +2933,7 @@
           <a:p>
             <a:fld id="{AB6FC267-2E41-4708-BFF3-2E183C4279E0}" type="datetimeFigureOut">
               <a:rPr lang="id-ID" smtClean="0"/>
-              <a:t>27/06/2026</a:t>
+              <a:t>10/07/2026</a:t>
             </a:fld>
             <a:endParaRPr lang="id-ID"/>
           </a:p>
@@ -3367,8 +3372,52 @@
           <a:lstStyle/>
           <a:p>
             <a:r>
-              <a:rPr lang="id-ID" dirty="0"/>
-              <a:t>Slide 1 — Fade</a:t>
+              <a:rPr lang="id-ID" dirty="0">
+                <a:ln w="0"/>
+                <a:solidFill>
+                  <a:schemeClr val="accent1"/>
+                </a:solidFill>
+                <a:effectLst>
+                  <a:outerShdw blurRad="38100" dist="25400" dir="5400000" algn="ctr" rotWithShape="0">
+                    <a:srgbClr val="6E747A">
+                      <a:alpha val="43000"/>
+                    </a:srgbClr>
+                  </a:outerShdw>
+                </a:effectLst>
+              </a:rPr>
+              <a:t>Slide 1 </a:t>
+            </a:r>
+            <a:r>
+              <a:rPr lang="en-US" dirty="0">
+                <a:ln w="0"/>
+                <a:solidFill>
+                  <a:schemeClr val="accent1"/>
+                </a:solidFill>
+                <a:effectLst>
+                  <a:outerShdw blurRad="38100" dist="25400" dir="5400000" algn="ctr" rotWithShape="0">
+                    <a:srgbClr val="6E747A">
+                      <a:alpha val="43000"/>
+                    </a:srgbClr>
+                  </a:outerShdw>
+                </a:effectLst>
+              </a:rPr>
+              <a:t>→ </a:t>
+            </a:r>
+            <a:r>
+              <a:rPr lang="id-ID" dirty="0">
+                <a:ln w="0"/>
+                <a:solidFill>
+                  <a:schemeClr val="accent1"/>
+                </a:solidFill>
+                <a:effectLst>
+                  <a:outerShdw blurRad="38100" dist="25400" dir="5400000" algn="ctr" rotWithShape="0">
+                    <a:srgbClr val="6E747A">
+                      <a:alpha val="43000"/>
+                    </a:srgbClr>
+                  </a:outerShdw>
+                </a:effectLst>
+              </a:rPr>
+              <a:t>Fade</a:t>
             </a:r>
           </a:p>
         </p:txBody>
@@ -3383,13 +3432,13 @@
   <p:clrMapOvr>
     <a:masterClrMapping/>
   </p:clrMapOvr>
-  <mc:AlternateContent xmlns:mc="http://schemas.openxmlformats.org/markup-compatibility/2006">
-    <mc:Choice xmlns:p14="http://schemas.microsoft.com/office/powerpoint/2010/main" Requires="p14">
+  <mc:AlternateContent xmlns:mc="http://schemas.openxmlformats.org/markup-compatibility/2006" xmlns:p14="http://schemas.microsoft.com/office/powerpoint/2010/main">
+    <mc:Choice Requires="p14">
       <p:transition spd="slow" p14:dur="2000" advTm="3000">
         <p:fade/>
       </p:transition>
     </mc:Choice>
-    <mc:Fallback>
+    <mc:Fallback xmlns="">
       <p:transition spd="slow" advTm="3000">
         <p:fade/>
       </p:transition>
@@ -3437,8 +3486,52 @@
           <a:lstStyle/>
           <a:p>
             <a:r>
-              <a:rPr lang="id-ID" dirty="0"/>
-              <a:t>Slide 2 — Push</a:t>
+              <a:rPr lang="id-ID" dirty="0">
+                <a:ln w="0"/>
+                <a:solidFill>
+                  <a:schemeClr val="accent1"/>
+                </a:solidFill>
+                <a:effectLst>
+                  <a:outerShdw blurRad="38100" dist="25400" dir="5400000" algn="ctr" rotWithShape="0">
+                    <a:srgbClr val="6E747A">
+                      <a:alpha val="43000"/>
+                    </a:srgbClr>
+                  </a:outerShdw>
+                </a:effectLst>
+              </a:rPr>
+              <a:t>Slide 2 </a:t>
+            </a:r>
+            <a:r>
+              <a:rPr lang="en-US" dirty="0">
+                <a:ln w="0"/>
+                <a:solidFill>
+                  <a:schemeClr val="accent1"/>
+                </a:solidFill>
+                <a:effectLst>
+                  <a:outerShdw blurRad="38100" dist="25400" dir="5400000" algn="ctr" rotWithShape="0">
+                    <a:srgbClr val="6E747A">
+                      <a:alpha val="43000"/>
+                    </a:srgbClr>
+                  </a:outerShdw>
+                </a:effectLst>
+              </a:rPr>
+              <a:t>→ </a:t>
+            </a:r>
+            <a:r>
+              <a:rPr lang="id-ID" dirty="0">
+                <a:ln w="0"/>
+                <a:solidFill>
+                  <a:schemeClr val="accent1"/>
+                </a:solidFill>
+                <a:effectLst>
+                  <a:outerShdw blurRad="38100" dist="25400" dir="5400000" algn="ctr" rotWithShape="0">
+                    <a:srgbClr val="6E747A">
+                      <a:alpha val="43000"/>
+                    </a:srgbClr>
+                  </a:outerShdw>
+                </a:effectLst>
+              </a:rPr>
+              <a:t>Push</a:t>
             </a:r>
           </a:p>
         </p:txBody>
@@ -3453,13 +3546,13 @@
   <p:clrMapOvr>
     <a:masterClrMapping/>
   </p:clrMapOvr>
-  <mc:AlternateContent xmlns:mc="http://schemas.openxmlformats.org/markup-compatibility/2006">
-    <mc:Choice xmlns:p14="http://schemas.microsoft.com/office/powerpoint/2010/main" Requires="p14">
+  <mc:AlternateContent xmlns:mc="http://schemas.openxmlformats.org/markup-compatibility/2006" xmlns:p14="http://schemas.microsoft.com/office/powerpoint/2010/main">
+    <mc:Choice Requires="p14">
       <p:transition spd="slow" p14:dur="2000" advTm="3000">
         <p:push dir="u"/>
       </p:transition>
     </mc:Choice>
-    <mc:Fallback>
+    <mc:Fallback xmlns="">
       <p:transition spd="slow" advTm="3000">
         <p:push dir="u"/>
       </p:transition>
@@ -3507,8 +3600,52 @@
           <a:lstStyle/>
           <a:p>
             <a:r>
-              <a:rPr lang="id-ID" dirty="0"/>
-              <a:t>Slide 3 — Wipe</a:t>
+              <a:rPr lang="id-ID" dirty="0">
+                <a:ln w="0"/>
+                <a:solidFill>
+                  <a:schemeClr val="accent1"/>
+                </a:solidFill>
+                <a:effectLst>
+                  <a:outerShdw blurRad="38100" dist="25400" dir="5400000" algn="ctr" rotWithShape="0">
+                    <a:srgbClr val="6E747A">
+                      <a:alpha val="43000"/>
+                    </a:srgbClr>
+                  </a:outerShdw>
+                </a:effectLst>
+              </a:rPr>
+              <a:t>Slide 3 </a:t>
+            </a:r>
+            <a:r>
+              <a:rPr lang="en-US" dirty="0">
+                <a:ln w="0"/>
+                <a:solidFill>
+                  <a:schemeClr val="accent1"/>
+                </a:solidFill>
+                <a:effectLst>
+                  <a:outerShdw blurRad="38100" dist="25400" dir="5400000" algn="ctr" rotWithShape="0">
+                    <a:srgbClr val="6E747A">
+                      <a:alpha val="43000"/>
+                    </a:srgbClr>
+                  </a:outerShdw>
+                </a:effectLst>
+              </a:rPr>
+              <a:t>→ </a:t>
+            </a:r>
+            <a:r>
+              <a:rPr lang="id-ID" dirty="0">
+                <a:ln w="0"/>
+                <a:solidFill>
+                  <a:schemeClr val="accent1"/>
+                </a:solidFill>
+                <a:effectLst>
+                  <a:outerShdw blurRad="38100" dist="25400" dir="5400000" algn="ctr" rotWithShape="0">
+                    <a:srgbClr val="6E747A">
+                      <a:alpha val="43000"/>
+                    </a:srgbClr>
+                  </a:outerShdw>
+                </a:effectLst>
+              </a:rPr>
+              <a:t>Wipe</a:t>
             </a:r>
           </a:p>
         </p:txBody>
@@ -3523,13 +3660,13 @@
   <p:clrMapOvr>
     <a:masterClrMapping/>
   </p:clrMapOvr>
-  <mc:AlternateContent xmlns:mc="http://schemas.openxmlformats.org/markup-compatibility/2006">
-    <mc:Choice xmlns:p14="http://schemas.microsoft.com/office/powerpoint/2010/main" Requires="p14">
+  <mc:AlternateContent xmlns:mc="http://schemas.openxmlformats.org/markup-compatibility/2006" xmlns:p14="http://schemas.microsoft.com/office/powerpoint/2010/main">
+    <mc:Choice Requires="p14">
       <p:transition spd="slow" p14:dur="2000" advTm="3000">
         <p:wipe/>
       </p:transition>
     </mc:Choice>
-    <mc:Fallback>
+    <mc:Fallback xmlns="">
       <p:transition spd="slow" advTm="3000">
         <p:wipe/>
       </p:transition>
@@ -3577,8 +3714,52 @@
           <a:lstStyle/>
           <a:p>
             <a:r>
-              <a:rPr lang="id-ID" dirty="0"/>
-              <a:t>Slide 4 — Morph</a:t>
+              <a:rPr lang="id-ID" dirty="0">
+                <a:ln w="0"/>
+                <a:solidFill>
+                  <a:schemeClr val="accent1"/>
+                </a:solidFill>
+                <a:effectLst>
+                  <a:outerShdw blurRad="38100" dist="25400" dir="5400000" algn="ctr" rotWithShape="0">
+                    <a:srgbClr val="6E747A">
+                      <a:alpha val="43000"/>
+                    </a:srgbClr>
+                  </a:outerShdw>
+                </a:effectLst>
+              </a:rPr>
+              <a:t>Slide 4 </a:t>
+            </a:r>
+            <a:r>
+              <a:rPr lang="en-US" dirty="0">
+                <a:ln w="0"/>
+                <a:solidFill>
+                  <a:schemeClr val="accent1"/>
+                </a:solidFill>
+                <a:effectLst>
+                  <a:outerShdw blurRad="38100" dist="25400" dir="5400000" algn="ctr" rotWithShape="0">
+                    <a:srgbClr val="6E747A">
+                      <a:alpha val="43000"/>
+                    </a:srgbClr>
+                  </a:outerShdw>
+                </a:effectLst>
+              </a:rPr>
+              <a:t>→ </a:t>
+            </a:r>
+            <a:r>
+              <a:rPr lang="id-ID" dirty="0">
+                <a:ln w="0"/>
+                <a:solidFill>
+                  <a:schemeClr val="accent1"/>
+                </a:solidFill>
+                <a:effectLst>
+                  <a:outerShdw blurRad="38100" dist="25400" dir="5400000" algn="ctr" rotWithShape="0">
+                    <a:srgbClr val="6E747A">
+                      <a:alpha val="43000"/>
+                    </a:srgbClr>
+                  </a:outerShdw>
+                </a:effectLst>
+              </a:rPr>
+              <a:t>Morph</a:t>
             </a:r>
           </a:p>
         </p:txBody>
@@ -3593,13 +3774,13 @@
   <p:clrMapOvr>
     <a:masterClrMapping/>
   </p:clrMapOvr>
-  <mc:AlternateContent xmlns:mc="http://schemas.openxmlformats.org/markup-compatibility/2006">
-    <mc:Choice xmlns:p159="http://schemas.microsoft.com/office/powerpoint/2015/09/main" Requires="p159">
+  <mc:AlternateContent xmlns:mc="http://schemas.openxmlformats.org/markup-compatibility/2006" xmlns:p159="http://schemas.microsoft.com/office/powerpoint/2015/09/main">
+    <mc:Choice Requires="p159">
       <p:transition xmlns:p14="http://schemas.microsoft.com/office/powerpoint/2010/main" spd="slow" p14:dur="2000" advTm="3000">
         <p159:morph option="byObject"/>
       </p:transition>
     </mc:Choice>
-    <mc:Fallback>
+    <mc:Fallback xmlns="">
       <p:transition spd="slow" advTm="3000">
         <p:fade/>
       </p:transition>
